--- a/resources/ppt_v0.pptx
+++ b/resources/ppt_v0.pptx
@@ -220,7 +220,7 @@
           <a:p>
             <a:fld id="{EB73D737-6180-4025-A907-7C9E2988EAF4}" type="datetimeFigureOut">
               <a:rPr lang="en-US" smtClean="0"/>
-              <a:t>1/29/2024</a:t>
+              <a:t>5/24/2024</a:t>
             </a:fld>
             <a:endParaRPr lang="en-US"/>
           </a:p>
@@ -760,7 +760,7 @@
           <a:p>
             <a:fld id="{259A546A-1104-411C-930F-AF07A3D180E4}" type="datetimeFigureOut">
               <a:rPr lang="en-US" smtClean="0"/>
-              <a:t>1/29/2024</a:t>
+              <a:t>5/24/2024</a:t>
             </a:fld>
             <a:endParaRPr lang="en-US"/>
           </a:p>
@@ -958,7 +958,7 @@
           <a:p>
             <a:fld id="{259A546A-1104-411C-930F-AF07A3D180E4}" type="datetimeFigureOut">
               <a:rPr lang="en-US" smtClean="0"/>
-              <a:t>1/29/2024</a:t>
+              <a:t>5/24/2024</a:t>
             </a:fld>
             <a:endParaRPr lang="en-US"/>
           </a:p>
@@ -1166,7 +1166,7 @@
           <a:p>
             <a:fld id="{259A546A-1104-411C-930F-AF07A3D180E4}" type="datetimeFigureOut">
               <a:rPr lang="en-US" smtClean="0"/>
-              <a:t>1/29/2024</a:t>
+              <a:t>5/24/2024</a:t>
             </a:fld>
             <a:endParaRPr lang="en-US"/>
           </a:p>
@@ -1364,7 +1364,7 @@
           <a:p>
             <a:fld id="{259A546A-1104-411C-930F-AF07A3D180E4}" type="datetimeFigureOut">
               <a:rPr lang="en-US" smtClean="0"/>
-              <a:t>1/29/2024</a:t>
+              <a:t>5/24/2024</a:t>
             </a:fld>
             <a:endParaRPr lang="en-US"/>
           </a:p>
@@ -1639,7 +1639,7 @@
           <a:p>
             <a:fld id="{259A546A-1104-411C-930F-AF07A3D180E4}" type="datetimeFigureOut">
               <a:rPr lang="en-US" smtClean="0"/>
-              <a:t>1/29/2024</a:t>
+              <a:t>5/24/2024</a:t>
             </a:fld>
             <a:endParaRPr lang="en-US"/>
           </a:p>
@@ -1904,7 +1904,7 @@
           <a:p>
             <a:fld id="{259A546A-1104-411C-930F-AF07A3D180E4}" type="datetimeFigureOut">
               <a:rPr lang="en-US" smtClean="0"/>
-              <a:t>1/29/2024</a:t>
+              <a:t>5/24/2024</a:t>
             </a:fld>
             <a:endParaRPr lang="en-US"/>
           </a:p>
@@ -2316,7 +2316,7 @@
           <a:p>
             <a:fld id="{259A546A-1104-411C-930F-AF07A3D180E4}" type="datetimeFigureOut">
               <a:rPr lang="en-US" smtClean="0"/>
-              <a:t>1/29/2024</a:t>
+              <a:t>5/24/2024</a:t>
             </a:fld>
             <a:endParaRPr lang="en-US"/>
           </a:p>
@@ -2457,7 +2457,7 @@
           <a:p>
             <a:fld id="{259A546A-1104-411C-930F-AF07A3D180E4}" type="datetimeFigureOut">
               <a:rPr lang="en-US" smtClean="0"/>
-              <a:t>1/29/2024</a:t>
+              <a:t>5/24/2024</a:t>
             </a:fld>
             <a:endParaRPr lang="en-US"/>
           </a:p>
@@ -2570,7 +2570,7 @@
           <a:p>
             <a:fld id="{259A546A-1104-411C-930F-AF07A3D180E4}" type="datetimeFigureOut">
               <a:rPr lang="en-US" smtClean="0"/>
-              <a:t>1/29/2024</a:t>
+              <a:t>5/24/2024</a:t>
             </a:fld>
             <a:endParaRPr lang="en-US"/>
           </a:p>
@@ -2881,7 +2881,7 @@
           <a:p>
             <a:fld id="{259A546A-1104-411C-930F-AF07A3D180E4}" type="datetimeFigureOut">
               <a:rPr lang="en-US" smtClean="0"/>
-              <a:t>1/29/2024</a:t>
+              <a:t>5/24/2024</a:t>
             </a:fld>
             <a:endParaRPr lang="en-US"/>
           </a:p>
@@ -3169,7 +3169,7 @@
           <a:p>
             <a:fld id="{259A546A-1104-411C-930F-AF07A3D180E4}" type="datetimeFigureOut">
               <a:rPr lang="en-US" smtClean="0"/>
-              <a:t>1/29/2024</a:t>
+              <a:t>5/24/2024</a:t>
             </a:fld>
             <a:endParaRPr lang="en-US"/>
           </a:p>
@@ -3410,7 +3410,7 @@
           <a:p>
             <a:fld id="{259A546A-1104-411C-930F-AF07A3D180E4}" type="datetimeFigureOut">
               <a:rPr lang="en-US" smtClean="0"/>
-              <a:t>1/29/2024</a:t>
+              <a:t>5/24/2024</a:t>
             </a:fld>
             <a:endParaRPr lang="en-US"/>
           </a:p>
